--- a/decks/output/04-security-and-trust-v0.pptx
+++ b/decks/output/04-security-and-trust-v0.pptx
@@ -20,8 +20,6 @@
     <p:sldId id="268" r:id="rId19"/>
     <p:sldId id="269" r:id="rId20"/>
     <p:sldId id="270" r:id="rId21"/>
-    <p:sldId id="271" r:id="rId22"/>
-    <p:sldId id="272" r:id="rId23"/>
   </p:sldIdLst>
   <p:sldSz cx="12192000" cy="6858000" type="screen4x3"/>
   <p:notesSz cx="6858000" cy="9144000"/>
@@ -3485,7 +3483,7 @@
                 </a:solidFill>
                 <a:latin typeface="DM Sans"/>
               </a:rPr>
-              <a:t>04 · Security &amp; Trust · 10/17</a:t>
+              <a:t>04 · Security &amp; Trust · 10/15</a:t>
             </a:r>
           </a:p>
         </p:txBody>
@@ -3640,7 +3638,7 @@
                 </a:solidFill>
                 <a:latin typeface="DM Sans"/>
               </a:rPr>
-              <a:t>04 · Security &amp; Trust · 11/17</a:t>
+              <a:t>04 · Security &amp; Trust · 11/15</a:t>
             </a:r>
           </a:p>
         </p:txBody>
@@ -3679,8 +3677,8 @@
         </p:nvSpPr>
         <p:spPr>
           <a:xfrm>
-            <a:off x="800000" y="500000"/>
-            <a:ext cx="10500000" cy="700000"/>
+            <a:off x="1200000" y="2200000"/>
+            <a:ext cx="9700000" cy="1500000"/>
           </a:xfrm>
           <a:prstGeom prst="rect">
             <a:avLst/>
@@ -3693,73 +3691,43 @@
           </a:bodyPr>
           <a:lstStyle/>
           <a:p>
-            <a:pPr algn="l"/>
-            <a:r>
-              <a:rPr sz="3200" b="1">
+            <a:pPr algn="ctr"/>
+            <a:r>
+              <a:rPr sz="4400" b="1">
                 <a:solidFill>
                   <a:srgbClr val="0E1411"/>
                 </a:solidFill>
-                <a:latin typeface="DM Sans"/>
+                <a:latin typeface="Playfair Display"/>
               </a:rPr>
-              <a:t>Six roles, one guard</a:t>
-            </a:r>
-          </a:p>
-        </p:txBody>
-      </p:sp>
-      <p:sp>
-        <p:nvSpPr>
-          <p:cNvPr id="3" name="Rectangle 2"/>
-          <p:cNvSpPr/>
-          <p:nvPr/>
-        </p:nvSpPr>
-        <p:spPr>
-          <a:xfrm>
-            <a:off x="800000" y="1500000"/>
-            <a:ext cx="5800000" cy="4500000"/>
-          </a:xfrm>
-          <a:prstGeom prst="rect">
-            <a:avLst/>
-          </a:prstGeom>
-          <a:solidFill>
-            <a:srgbClr val="FBF7EF"/>
-          </a:solidFill>
-          <a:ln>
-            <a:solidFill>
-              <a:srgbClr val="D8CFBE"/>
-            </a:solidFill>
-          </a:ln>
-        </p:spPr>
-        <p:style>
-          <a:lnRef idx="1">
-            <a:schemeClr val="accent1"/>
-          </a:lnRef>
-          <a:fillRef idx="3">
-            <a:schemeClr val="accent1"/>
-          </a:fillRef>
-          <a:effectRef idx="2">
-            <a:schemeClr val="accent1"/>
-          </a:effectRef>
-          <a:fontRef idx="minor">
-            <a:schemeClr val="lt1"/>
-          </a:fontRef>
-        </p:style>
-        <p:txBody>
-          <a:bodyPr rtlCol="0" anchor="ctr"/>
-          <a:lstStyle/>
-          <a:p>
-            <a:pPr algn="ctr"/>
-            <a:r>
-              <a:rPr sz="1100">
-                <a:solidFill>
-                  <a:srgbClr val="8B6B22"/>
-                </a:solidFill>
-                <a:latin typeface="DM Sans"/>
-              </a:rPr>
-              <a:t>[REPLACE: S20-rbac-middleware.png]</a:t>
-            </a:r>
-          </a:p>
-        </p:txBody>
-      </p:sp>
+              <a:t>Login attempts are rate-limited at the edge.</a:t>
+            </a:r>
+          </a:p>
+        </p:txBody>
+      </p:sp>
+      <p:pic>
+        <p:nvPicPr>
+          <p:cNvPr id="3" name="Picture 2" descr="gold-deco-hairline.png"/>
+          <p:cNvPicPr>
+            <a:picLocks noChangeAspect="1"/>
+          </p:cNvPicPr>
+          <p:nvPr/>
+        </p:nvPicPr>
+        <p:blipFill>
+          <a:blip r:embed="rId2"/>
+          <a:stretch>
+            <a:fillRect/>
+          </a:stretch>
+        </p:blipFill>
+        <p:spPr>
+          <a:xfrm>
+            <a:off x="5896000" y="3800000"/>
+            <a:ext cx="400000" cy="20000"/>
+          </a:xfrm>
+          <a:prstGeom prst="rect">
+            <a:avLst/>
+          </a:prstGeom>
+        </p:spPr>
+      </p:pic>
       <p:sp>
         <p:nvSpPr>
           <p:cNvPr id="4" name="TextBox 3"/>
@@ -3768,8 +3736,8 @@
         </p:nvSpPr>
         <p:spPr>
           <a:xfrm>
-            <a:off x="7100000" y="1500000"/>
-            <a:ext cx="4200000" cy="1100000"/>
+            <a:off x="1500000" y="4100000"/>
+            <a:ext cx="9100000" cy="1200000"/>
           </a:xfrm>
           <a:prstGeom prst="rect">
             <a:avLst/>
@@ -3782,15 +3750,15 @@
           </a:bodyPr>
           <a:lstStyle/>
           <a:p>
-            <a:pPr algn="l"/>
-            <a:r>
-              <a:rPr sz="1600" b="0">
+            <a:pPr algn="ctr"/>
+            <a:r>
+              <a:rPr sz="2200" b="0">
                 <a:solidFill>
                   <a:srgbClr val="1A1714"/>
                 </a:solidFill>
                 <a:latin typeface="DM Sans"/>
               </a:rPr>
-              <a:t>①  superadmin, admin, director, receptionist, it, staff.</a:t>
+              <a:t>KV-backed counters per email, per IP, per staff ID. Brute force has nowhere to land.</a:t>
             </a:r>
           </a:p>
         </p:txBody>
@@ -3803,8 +3771,8 @@
         </p:nvSpPr>
         <p:spPr>
           <a:xfrm>
-            <a:off x="7100000" y="2800000"/>
-            <a:ext cx="4200000" cy="1100000"/>
+            <a:off x="8000000" y="6500000"/>
+            <a:ext cx="4000000" cy="300000"/>
           </a:xfrm>
           <a:prstGeom prst="rect">
             <a:avLst/>
@@ -3817,120 +3785,15 @@
           </a:bodyPr>
           <a:lstStyle/>
           <a:p>
-            <a:pPr algn="l"/>
-            <a:r>
-              <a:rPr sz="1600" b="0">
-                <a:solidFill>
-                  <a:srgbClr val="1A1714"/>
+            <a:pPr algn="r"/>
+            <a:r>
+              <a:rPr sz="1100" b="0">
+                <a:solidFill>
+                  <a:srgbClr val="D8CFBE"/>
                 </a:solidFill>
                 <a:latin typeface="DM Sans"/>
               </a:rPr>
-              <a:t>②  Routes declare required role inline.</a:t>
-            </a:r>
-          </a:p>
-        </p:txBody>
-      </p:sp>
-      <p:sp>
-        <p:nvSpPr>
-          <p:cNvPr id="6" name="TextBox 5"/>
-          <p:cNvSpPr txBox="1"/>
-          <p:nvPr/>
-        </p:nvSpPr>
-        <p:spPr>
-          <a:xfrm>
-            <a:off x="7100000" y="4100000"/>
-            <a:ext cx="4200000" cy="1100000"/>
-          </a:xfrm>
-          <a:prstGeom prst="rect">
-            <a:avLst/>
-          </a:prstGeom>
-          <a:noFill/>
-        </p:spPr>
-        <p:txBody>
-          <a:bodyPr wrap="square">
-            <a:spAutoFit/>
-          </a:bodyPr>
-          <a:lstStyle/>
-          <a:p>
-            <a:pPr algn="l"/>
-            <a:r>
-              <a:rPr sz="1600" b="0">
-                <a:solidFill>
-                  <a:srgbClr val="1A1714"/>
-                </a:solidFill>
-                <a:latin typeface="DM Sans"/>
-              </a:rPr>
-              <a:t>③  Drift is detectable — every endpoint exercises the guard.</a:t>
-            </a:r>
-          </a:p>
-        </p:txBody>
-      </p:sp>
-      <p:sp>
-        <p:nvSpPr>
-          <p:cNvPr id="7" name="TextBox 6"/>
-          <p:cNvSpPr txBox="1"/>
-          <p:nvPr/>
-        </p:nvSpPr>
-        <p:spPr>
-          <a:xfrm>
-            <a:off x="800000" y="6100000"/>
-            <a:ext cx="10500000" cy="300000"/>
-          </a:xfrm>
-          <a:prstGeom prst="rect">
-            <a:avLst/>
-          </a:prstGeom>
-          <a:noFill/>
-        </p:spPr>
-        <p:txBody>
-          <a:bodyPr wrap="square">
-            <a:spAutoFit/>
-          </a:bodyPr>
-          <a:lstStyle/>
-          <a:p>
-            <a:pPr algn="l"/>
-            <a:r>
-              <a:rPr sz="1100" b="0">
-                <a:solidFill>
-                  <a:srgbClr val="8B6B22"/>
-                </a:solidFill>
-                <a:latin typeface="DM Sans"/>
-              </a:rPr>
-              <a:t>packages/api/src/lib/require-role.ts</a:t>
-            </a:r>
-          </a:p>
-        </p:txBody>
-      </p:sp>
-      <p:sp>
-        <p:nvSpPr>
-          <p:cNvPr id="8" name="TextBox 7"/>
-          <p:cNvSpPr txBox="1"/>
-          <p:nvPr/>
-        </p:nvSpPr>
-        <p:spPr>
-          <a:xfrm>
-            <a:off x="8000000" y="6500000"/>
-            <a:ext cx="4000000" cy="300000"/>
-          </a:xfrm>
-          <a:prstGeom prst="rect">
-            <a:avLst/>
-          </a:prstGeom>
-          <a:noFill/>
-        </p:spPr>
-        <p:txBody>
-          <a:bodyPr wrap="square">
-            <a:spAutoFit/>
-          </a:bodyPr>
-          <a:lstStyle/>
-          <a:p>
-            <a:pPr algn="r"/>
-            <a:r>
-              <a:rPr sz="1100" b="0">
-                <a:solidFill>
-                  <a:srgbClr val="D8CFBE"/>
-                </a:solidFill>
-                <a:latin typeface="DM Sans"/>
-              </a:rPr>
-              <a:t>04 · Security &amp; Trust · 12/17</a:t>
+              <a:t>04 · Security &amp; Trust · 12/15</a:t>
             </a:r>
           </a:p>
         </p:txBody>
@@ -3991,7 +3854,7 @@
                 </a:solidFill>
                 <a:latin typeface="Playfair Display"/>
               </a:rPr>
-              <a:t>Login attempts are rate-limited at the edge.</a:t>
+              <a:t>Migrations are tracked, not whispered.</a:t>
             </a:r>
           </a:p>
         </p:txBody>
@@ -4050,7 +3913,7 @@
                 </a:solidFill>
                 <a:latin typeface="DM Sans"/>
               </a:rPr>
-              <a:t>KV-backed counters per email, per IP, per staff ID. Brute force has nowhere to land.</a:t>
+              <a:t>An applied_migrations table records every schema change. The runner is superadmin-only.</a:t>
             </a:r>
           </a:p>
         </p:txBody>
@@ -4085,7 +3948,7 @@
                 </a:solidFill>
                 <a:latin typeface="DM Sans"/>
               </a:rPr>
-              <a:t>04 · Security &amp; Trust · 13/17</a:t>
+              <a:t>04 · Security &amp; Trust · 13/15</a:t>
             </a:r>
           </a:p>
         </p:txBody>
@@ -4104,7 +3967,7 @@
     <p:bg>
       <p:bgPr>
         <a:solidFill>
-          <a:srgbClr val="F6F1E7"/>
+          <a:srgbClr val="0E1411"/>
         </a:solidFill>
         <a:effectLst/>
       </p:bgPr>
@@ -4116,16 +3979,40 @@
         <p:nvPr/>
       </p:nvGrpSpPr>
       <p:grpSpPr/>
-      <p:sp>
-        <p:nvSpPr>
-          <p:cNvPr id="2" name="TextBox 1"/>
+      <p:pic>
+        <p:nvPicPr>
+          <p:cNvPr id="2" name="Picture 1" descr="kente-texture-overlay.png"/>
+          <p:cNvPicPr>
+            <a:picLocks noChangeAspect="1"/>
+          </p:cNvPicPr>
+          <p:nvPr/>
+        </p:nvPicPr>
+        <p:blipFill>
+          <a:blip r:embed="rId2"/>
+          <a:stretch>
+            <a:fillRect/>
+          </a:stretch>
+        </p:blipFill>
+        <p:spPr>
+          <a:xfrm>
+            <a:off x="0" y="0"/>
+            <a:ext cx="12192000" cy="6858000"/>
+          </a:xfrm>
+          <a:prstGeom prst="rect">
+            <a:avLst/>
+          </a:prstGeom>
+        </p:spPr>
+      </p:pic>
+      <p:sp>
+        <p:nvSpPr>
+          <p:cNvPr id="3" name="TextBox 2"/>
           <p:cNvSpPr txBox="1"/>
           <p:nvPr/>
         </p:nvSpPr>
         <p:spPr>
           <a:xfrm>
-            <a:off x="800000" y="500000"/>
-            <a:ext cx="10500000" cy="700000"/>
+            <a:off x="1600000" y="2800000"/>
+            <a:ext cx="8900000" cy="2000000"/>
           </a:xfrm>
           <a:prstGeom prst="rect">
             <a:avLst/>
@@ -4138,244 +4025,15 @@
           </a:bodyPr>
           <a:lstStyle/>
           <a:p>
-            <a:pPr algn="l"/>
-            <a:r>
-              <a:rPr sz="3200" b="1">
-                <a:solidFill>
-                  <a:srgbClr val="0E1411"/>
-                </a:solidFill>
-                <a:latin typeface="DM Sans"/>
+            <a:pPr algn="ctr"/>
+            <a:r>
+              <a:rPr sz="4400" b="0">
+                <a:solidFill>
+                  <a:srgbClr val="F6F1E7"/>
+                </a:solidFill>
+                <a:latin typeface="Playfair Display"/>
               </a:rPr>
-              <a:t>Rate-limit hit, surfaced to the user</a:t>
-            </a:r>
-          </a:p>
-        </p:txBody>
-      </p:sp>
-      <p:sp>
-        <p:nvSpPr>
-          <p:cNvPr id="3" name="Rectangle 2"/>
-          <p:cNvSpPr/>
-          <p:nvPr/>
-        </p:nvSpPr>
-        <p:spPr>
-          <a:xfrm>
-            <a:off x="800000" y="1500000"/>
-            <a:ext cx="5800000" cy="4500000"/>
-          </a:xfrm>
-          <a:prstGeom prst="rect">
-            <a:avLst/>
-          </a:prstGeom>
-          <a:solidFill>
-            <a:srgbClr val="FBF7EF"/>
-          </a:solidFill>
-          <a:ln>
-            <a:solidFill>
-              <a:srgbClr val="D8CFBE"/>
-            </a:solidFill>
-          </a:ln>
-        </p:spPr>
-        <p:style>
-          <a:lnRef idx="1">
-            <a:schemeClr val="accent1"/>
-          </a:lnRef>
-          <a:fillRef idx="3">
-            <a:schemeClr val="accent1"/>
-          </a:fillRef>
-          <a:effectRef idx="2">
-            <a:schemeClr val="accent1"/>
-          </a:effectRef>
-          <a:fontRef idx="minor">
-            <a:schemeClr val="lt1"/>
-          </a:fontRef>
-        </p:style>
-        <p:txBody>
-          <a:bodyPr rtlCol="0" anchor="ctr"/>
-          <a:lstStyle/>
-          <a:p>
-            <a:pPr algn="ctr"/>
-            <a:r>
-              <a:rPr sz="1100">
-                <a:solidFill>
-                  <a:srgbClr val="8B6B22"/>
-                </a:solidFill>
-                <a:latin typeface="DM Sans"/>
-              </a:rPr>
-              <a:t>[REPLACE: S33-ratelimit-hit.png]</a:t>
-            </a:r>
-          </a:p>
-        </p:txBody>
-      </p:sp>
-      <p:sp>
-        <p:nvSpPr>
-          <p:cNvPr id="4" name="TextBox 3"/>
-          <p:cNvSpPr txBox="1"/>
-          <p:nvPr/>
-        </p:nvSpPr>
-        <p:spPr>
-          <a:xfrm>
-            <a:off x="7100000" y="1500000"/>
-            <a:ext cx="4200000" cy="1100000"/>
-          </a:xfrm>
-          <a:prstGeom prst="rect">
-            <a:avLst/>
-          </a:prstGeom>
-          <a:noFill/>
-        </p:spPr>
-        <p:txBody>
-          <a:bodyPr wrap="square">
-            <a:spAutoFit/>
-          </a:bodyPr>
-          <a:lstStyle/>
-          <a:p>
-            <a:pPr algn="l"/>
-            <a:r>
-              <a:rPr sz="1600" b="0">
-                <a:solidFill>
-                  <a:srgbClr val="1A1714"/>
-                </a:solidFill>
-                <a:latin typeface="DM Sans"/>
-              </a:rPr>
-              <a:t>①  /auth/login, /auth/verify, /auth/pin-login all gated.</a:t>
-            </a:r>
-          </a:p>
-        </p:txBody>
-      </p:sp>
-      <p:sp>
-        <p:nvSpPr>
-          <p:cNvPr id="5" name="TextBox 4"/>
-          <p:cNvSpPr txBox="1"/>
-          <p:nvPr/>
-        </p:nvSpPr>
-        <p:spPr>
-          <a:xfrm>
-            <a:off x="7100000" y="2800000"/>
-            <a:ext cx="4200000" cy="1100000"/>
-          </a:xfrm>
-          <a:prstGeom prst="rect">
-            <a:avLst/>
-          </a:prstGeom>
-          <a:noFill/>
-        </p:spPr>
-        <p:txBody>
-          <a:bodyPr wrap="square">
-            <a:spAutoFit/>
-          </a:bodyPr>
-          <a:lstStyle/>
-          <a:p>
-            <a:pPr algn="l"/>
-            <a:r>
-              <a:rPr sz="1600" b="0">
-                <a:solidFill>
-                  <a:srgbClr val="1A1714"/>
-                </a:solidFill>
-                <a:latin typeface="DM Sans"/>
-              </a:rPr>
-              <a:t>②  Cloudflare KV stores hit counts with TTL.</a:t>
-            </a:r>
-          </a:p>
-        </p:txBody>
-      </p:sp>
-      <p:sp>
-        <p:nvSpPr>
-          <p:cNvPr id="6" name="TextBox 5"/>
-          <p:cNvSpPr txBox="1"/>
-          <p:nvPr/>
-        </p:nvSpPr>
-        <p:spPr>
-          <a:xfrm>
-            <a:off x="7100000" y="4100000"/>
-            <a:ext cx="4200000" cy="1100000"/>
-          </a:xfrm>
-          <a:prstGeom prst="rect">
-            <a:avLst/>
-          </a:prstGeom>
-          <a:noFill/>
-        </p:spPr>
-        <p:txBody>
-          <a:bodyPr wrap="square">
-            <a:spAutoFit/>
-          </a:bodyPr>
-          <a:lstStyle/>
-          <a:p>
-            <a:pPr algn="l"/>
-            <a:r>
-              <a:rPr sz="1600" b="0">
-                <a:solidFill>
-                  <a:srgbClr val="1A1714"/>
-                </a:solidFill>
-                <a:latin typeface="DM Sans"/>
-              </a:rPr>
-              <a:t>③  Counters reset cleanly — no false lockouts.</a:t>
-            </a:r>
-          </a:p>
-        </p:txBody>
-      </p:sp>
-      <p:sp>
-        <p:nvSpPr>
-          <p:cNvPr id="7" name="TextBox 6"/>
-          <p:cNvSpPr txBox="1"/>
-          <p:nvPr/>
-        </p:nvSpPr>
-        <p:spPr>
-          <a:xfrm>
-            <a:off x="800000" y="6100000"/>
-            <a:ext cx="10500000" cy="300000"/>
-          </a:xfrm>
-          <a:prstGeom prst="rect">
-            <a:avLst/>
-          </a:prstGeom>
-          <a:noFill/>
-        </p:spPr>
-        <p:txBody>
-          <a:bodyPr wrap="square">
-            <a:spAutoFit/>
-          </a:bodyPr>
-          <a:lstStyle/>
-          <a:p>
-            <a:pPr algn="l"/>
-            <a:r>
-              <a:rPr sz="1100" b="0">
-                <a:solidFill>
-                  <a:srgbClr val="8B6B22"/>
-                </a:solidFill>
-                <a:latin typeface="DM Sans"/>
-              </a:rPr>
-              <a:t>Captured from staff-attendance.pages.dev DevTools</a:t>
-            </a:r>
-          </a:p>
-        </p:txBody>
-      </p:sp>
-      <p:sp>
-        <p:nvSpPr>
-          <p:cNvPr id="8" name="TextBox 7"/>
-          <p:cNvSpPr txBox="1"/>
-          <p:nvPr/>
-        </p:nvSpPr>
-        <p:spPr>
-          <a:xfrm>
-            <a:off x="8000000" y="6500000"/>
-            <a:ext cx="4000000" cy="300000"/>
-          </a:xfrm>
-          <a:prstGeom prst="rect">
-            <a:avLst/>
-          </a:prstGeom>
-          <a:noFill/>
-        </p:spPr>
-        <p:txBody>
-          <a:bodyPr wrap="square">
-            <a:spAutoFit/>
-          </a:bodyPr>
-          <a:lstStyle/>
-          <a:p>
-            <a:pPr algn="r"/>
-            <a:r>
-              <a:rPr sz="1100" b="0">
-                <a:solidFill>
-                  <a:srgbClr val="D8CFBE"/>
-                </a:solidFill>
-                <a:latin typeface="DM Sans"/>
-              </a:rPr>
-              <a:t>04 · Security &amp; Trust · 14/17</a:t>
+              <a:t>Security shipped in the dark is security that erodes. SmartGate's was shipped in writing.</a:t>
             </a:r>
           </a:p>
         </p:txBody>
@@ -4414,8 +4072,8 @@
         </p:nvSpPr>
         <p:spPr>
           <a:xfrm>
-            <a:off x="1200000" y="2200000"/>
-            <a:ext cx="9700000" cy="1500000"/>
+            <a:off x="1000000" y="800000"/>
+            <a:ext cx="10000000" cy="700000"/>
           </a:xfrm>
           <a:prstGeom prst="rect">
             <a:avLst/>
@@ -4428,7 +4086,7 @@
           </a:bodyPr>
           <a:lstStyle/>
           <a:p>
-            <a:pPr algn="ctr"/>
+            <a:pPr algn="l"/>
             <a:r>
               <a:rPr sz="4400" b="1">
                 <a:solidFill>
@@ -4436,45 +4094,21 @@
                 </a:solidFill>
                 <a:latin typeface="Playfair Display"/>
               </a:rPr>
-              <a:t>Migrations are tracked, not whispered.</a:t>
-            </a:r>
-          </a:p>
-        </p:txBody>
-      </p:sp>
-      <p:pic>
-        <p:nvPicPr>
-          <p:cNvPr id="3" name="Picture 2" descr="gold-deco-hairline.png"/>
-          <p:cNvPicPr>
-            <a:picLocks noChangeAspect="1"/>
-          </p:cNvPicPr>
-          <p:nvPr/>
-        </p:nvPicPr>
-        <p:blipFill>
-          <a:blip r:embed="rId2"/>
-          <a:stretch>
-            <a:fillRect/>
-          </a:stretch>
-        </p:blipFill>
-        <p:spPr>
-          <a:xfrm>
-            <a:off x="5896000" y="3800000"/>
-            <a:ext cx="400000" cy="20000"/>
-          </a:xfrm>
-          <a:prstGeom prst="rect">
-            <a:avLst/>
-          </a:prstGeom>
-        </p:spPr>
-      </p:pic>
-      <p:sp>
-        <p:nvSpPr>
-          <p:cNvPr id="4" name="TextBox 3"/>
+              <a:t>Appendix</a:t>
+            </a:r>
+          </a:p>
+        </p:txBody>
+      </p:sp>
+      <p:sp>
+        <p:nvSpPr>
+          <p:cNvPr id="3" name="TextBox 2"/>
           <p:cNvSpPr txBox="1"/>
           <p:nvPr/>
         </p:nvSpPr>
         <p:spPr>
           <a:xfrm>
-            <a:off x="1500000" y="4100000"/>
-            <a:ext cx="9100000" cy="1200000"/>
+            <a:off x="1000000" y="2000000"/>
+            <a:ext cx="5000000" cy="400000"/>
           </a:xfrm>
           <a:prstGeom prst="rect">
             <a:avLst/>
@@ -4487,29 +4121,29 @@
           </a:bodyPr>
           <a:lstStyle/>
           <a:p>
-            <a:pPr algn="ctr"/>
-            <a:r>
-              <a:rPr sz="2200" b="0">
-                <a:solidFill>
-                  <a:srgbClr val="1A1714"/>
+            <a:pPr algn="l"/>
+            <a:r>
+              <a:rPr sz="1800" b="1">
+                <a:solidFill>
+                  <a:srgbClr val="8B6B22"/>
                 </a:solidFill>
                 <a:latin typeface="DM Sans"/>
               </a:rPr>
-              <a:t>An applied_migrations table records every schema change. The runner is superadmin-only.</a:t>
-            </a:r>
-          </a:p>
-        </p:txBody>
-      </p:sp>
-      <p:sp>
-        <p:nvSpPr>
-          <p:cNvPr id="5" name="TextBox 4"/>
+              <a:t>Live URLs</a:t>
+            </a:r>
+          </a:p>
+        </p:txBody>
+      </p:sp>
+      <p:sp>
+        <p:nvSpPr>
+          <p:cNvPr id="4" name="TextBox 3"/>
           <p:cNvSpPr txBox="1"/>
           <p:nvPr/>
         </p:nvSpPr>
         <p:spPr>
           <a:xfrm>
-            <a:off x="8000000" y="6500000"/>
-            <a:ext cx="4000000" cy="300000"/>
+            <a:off x="1000000" y="2500000"/>
+            <a:ext cx="5000000" cy="400000"/>
           </a:xfrm>
           <a:prstGeom prst="rect">
             <a:avLst/>
@@ -4522,79 +4156,29 @@
           </a:bodyPr>
           <a:lstStyle/>
           <a:p>
-            <a:pPr algn="r"/>
-            <a:r>
-              <a:rPr sz="1100" b="0">
-                <a:solidFill>
-                  <a:srgbClr val="D8CFBE"/>
+            <a:pPr algn="l"/>
+            <a:r>
+              <a:rPr sz="1400" b="0">
+                <a:solidFill>
+                  <a:srgbClr val="1A1714"/>
                 </a:solidFill>
                 <a:latin typeface="DM Sans"/>
               </a:rPr>
-              <a:t>04 · Security &amp; Trust · 15/17</a:t>
-            </a:r>
-          </a:p>
-        </p:txBody>
-      </p:sp>
-    </p:spTree>
-  </p:cSld>
-  <p:clrMapOvr>
-    <a:masterClrMapping/>
-  </p:clrMapOvr>
-</p:sld>
-</file>
-
-<file path=ppt/slides/slide16.xml><?xml version="1.0" encoding="utf-8"?>
-<p:sld xmlns:a="http://schemas.openxmlformats.org/drawingml/2006/main" xmlns:p="http://schemas.openxmlformats.org/presentationml/2006/main" xmlns:r="http://schemas.openxmlformats.org/officeDocument/2006/relationships">
-  <p:cSld>
-    <p:bg>
-      <p:bgPr>
-        <a:solidFill>
-          <a:srgbClr val="0E1411"/>
-        </a:solidFill>
-        <a:effectLst/>
-      </p:bgPr>
-    </p:bg>
-    <p:spTree>
-      <p:nvGrpSpPr>
-        <p:cNvPr id="1" name=""/>
-        <p:cNvGrpSpPr/>
-        <p:nvPr/>
-      </p:nvGrpSpPr>
-      <p:grpSpPr/>
-      <p:pic>
-        <p:nvPicPr>
-          <p:cNvPr id="2" name="Picture 1" descr="kente-texture-overlay.png"/>
-          <p:cNvPicPr>
-            <a:picLocks noChangeAspect="1"/>
-          </p:cNvPicPr>
-          <p:nvPr/>
-        </p:nvPicPr>
-        <p:blipFill>
-          <a:blip r:embed="rId2"/>
-          <a:stretch>
-            <a:fillRect/>
-          </a:stretch>
-        </p:blipFill>
-        <p:spPr>
-          <a:xfrm>
-            <a:off x="0" y="0"/>
-            <a:ext cx="12192000" cy="6858000"/>
-          </a:xfrm>
-          <a:prstGeom prst="rect">
-            <a:avLst/>
-          </a:prstGeom>
-        </p:spPr>
-      </p:pic>
-      <p:sp>
-        <p:nvSpPr>
-          <p:cNvPr id="3" name="TextBox 2"/>
+              <a:t>staff-attendance.pages.dev</a:t>
+            </a:r>
+          </a:p>
+        </p:txBody>
+      </p:sp>
+      <p:sp>
+        <p:nvSpPr>
+          <p:cNvPr id="5" name="TextBox 4"/>
           <p:cNvSpPr txBox="1"/>
           <p:nvPr/>
         </p:nvSpPr>
         <p:spPr>
           <a:xfrm>
-            <a:off x="1600000" y="2800000"/>
-            <a:ext cx="8900000" cy="2000000"/>
+            <a:off x="1000000" y="2900000"/>
+            <a:ext cx="5000000" cy="400000"/>
           </a:xfrm>
           <a:prstGeom prst="rect">
             <a:avLst/>
@@ -4607,55 +4191,29 @@
           </a:bodyPr>
           <a:lstStyle/>
           <a:p>
-            <a:pPr algn="ctr"/>
-            <a:r>
-              <a:rPr sz="4400" b="0">
-                <a:solidFill>
-                  <a:srgbClr val="F6F1E7"/>
-                </a:solidFill>
-                <a:latin typeface="Playfair Display"/>
+            <a:pPr algn="l"/>
+            <a:r>
+              <a:rPr sz="1400" b="0">
+                <a:solidFill>
+                  <a:srgbClr val="1A1714"/>
+                </a:solidFill>
+                <a:latin typeface="DM Sans"/>
               </a:rPr>
-              <a:t>Security shipped in the dark is security that erodes. SmartGate's was shipped in writing.</a:t>
-            </a:r>
-          </a:p>
-        </p:txBody>
-      </p:sp>
-    </p:spTree>
-  </p:cSld>
-  <p:clrMapOvr>
-    <a:masterClrMapping/>
-  </p:clrMapOvr>
-</p:sld>
-</file>
-
-<file path=ppt/slides/slide17.xml><?xml version="1.0" encoding="utf-8"?>
-<p:sld xmlns:a="http://schemas.openxmlformats.org/drawingml/2006/main" xmlns:p="http://schemas.openxmlformats.org/presentationml/2006/main" xmlns:r="http://schemas.openxmlformats.org/officeDocument/2006/relationships">
-  <p:cSld>
-    <p:bg>
-      <p:bgPr>
-        <a:solidFill>
-          <a:srgbClr val="F6F1E7"/>
-        </a:solidFill>
-        <a:effectLst/>
-      </p:bgPr>
-    </p:bg>
-    <p:spTree>
-      <p:nvGrpSpPr>
-        <p:cNvPr id="1" name=""/>
-        <p:cNvGrpSpPr/>
-        <p:nvPr/>
-      </p:nvGrpSpPr>
-      <p:grpSpPr/>
-      <p:sp>
-        <p:nvSpPr>
-          <p:cNvPr id="2" name="TextBox 1"/>
+              <a:t>ohcs-smartgate.pages.dev</a:t>
+            </a:r>
+          </a:p>
+        </p:txBody>
+      </p:sp>
+      <p:sp>
+        <p:nvSpPr>
+          <p:cNvPr id="6" name="TextBox 5"/>
           <p:cNvSpPr txBox="1"/>
           <p:nvPr/>
         </p:nvSpPr>
         <p:spPr>
           <a:xfrm>
-            <a:off x="1000000" y="800000"/>
-            <a:ext cx="10000000" cy="700000"/>
+            <a:off x="1000000" y="3300000"/>
+            <a:ext cx="5000000" cy="400000"/>
           </a:xfrm>
           <a:prstGeom prst="rect">
             <a:avLst/>
@@ -4670,26 +4228,26 @@
           <a:p>
             <a:pPr algn="l"/>
             <a:r>
-              <a:rPr sz="4400" b="1">
-                <a:solidFill>
-                  <a:srgbClr val="0E1411"/>
-                </a:solidFill>
-                <a:latin typeface="Playfair Display"/>
+              <a:rPr sz="1400" b="0">
+                <a:solidFill>
+                  <a:srgbClr val="1A1714"/>
+                </a:solidFill>
+                <a:latin typeface="DM Sans"/>
               </a:rPr>
-              <a:t>Appendix</a:t>
-            </a:r>
-          </a:p>
-        </p:txBody>
-      </p:sp>
-      <p:sp>
-        <p:nvSpPr>
-          <p:cNvPr id="3" name="TextBox 2"/>
+              <a:t>github.com/ghwmelite-dotcom/OHCS-SmartGate-Staff-Attendance-System</a:t>
+            </a:r>
+          </a:p>
+        </p:txBody>
+      </p:sp>
+      <p:sp>
+        <p:nvSpPr>
+          <p:cNvPr id="7" name="TextBox 6"/>
           <p:cNvSpPr txBox="1"/>
           <p:nvPr/>
         </p:nvSpPr>
         <p:spPr>
           <a:xfrm>
-            <a:off x="1000000" y="2000000"/>
+            <a:off x="7000000" y="2000000"/>
             <a:ext cx="5000000" cy="400000"/>
           </a:xfrm>
           <a:prstGeom prst="rect">
@@ -4711,20 +4269,20 @@
                 </a:solidFill>
                 <a:latin typeface="DM Sans"/>
               </a:rPr>
-              <a:t>Live URLs</a:t>
-            </a:r>
-          </a:p>
-        </p:txBody>
-      </p:sp>
-      <p:sp>
-        <p:nvSpPr>
-          <p:cNvPr id="4" name="TextBox 3"/>
+              <a:t>Related decks</a:t>
+            </a:r>
+          </a:p>
+        </p:txBody>
+      </p:sp>
+      <p:sp>
+        <p:nvSpPr>
+          <p:cNvPr id="8" name="TextBox 7"/>
           <p:cNvSpPr txBox="1"/>
           <p:nvPr/>
         </p:nvSpPr>
         <p:spPr>
           <a:xfrm>
-            <a:off x="1000000" y="2500000"/>
+            <a:off x="7000000" y="2500000"/>
             <a:ext cx="5000000" cy="400000"/>
           </a:xfrm>
           <a:prstGeom prst="rect">
@@ -4746,20 +4304,20 @@
                 </a:solidFill>
                 <a:latin typeface="DM Sans"/>
               </a:rPr>
-              <a:t>staff-attendance.pages.dev</a:t>
-            </a:r>
-          </a:p>
-        </p:txBody>
-      </p:sp>
-      <p:sp>
-        <p:nvSpPr>
-          <p:cNvPr id="5" name="TextBox 4"/>
+              <a:t>Deck 06 · The Notifications Engine</a:t>
+            </a:r>
+          </a:p>
+        </p:txBody>
+      </p:sp>
+      <p:sp>
+        <p:nvSpPr>
+          <p:cNvPr id="9" name="TextBox 8"/>
           <p:cNvSpPr txBox="1"/>
           <p:nvPr/>
         </p:nvSpPr>
         <p:spPr>
           <a:xfrm>
-            <a:off x="1000000" y="2900000"/>
+            <a:off x="7000000" y="2900000"/>
             <a:ext cx="5000000" cy="400000"/>
           </a:xfrm>
           <a:prstGeom prst="rect">
@@ -4781,21 +4339,21 @@
                 </a:solidFill>
                 <a:latin typeface="DM Sans"/>
               </a:rPr>
-              <a:t>ohcs-smartgate.pages.dev</a:t>
-            </a:r>
-          </a:p>
-        </p:txBody>
-      </p:sp>
-      <p:sp>
-        <p:nvSpPr>
-          <p:cNvPr id="6" name="TextBox 5"/>
+              <a:t>Deck 12 · The Build Discipline</a:t>
+            </a:r>
+          </a:p>
+        </p:txBody>
+      </p:sp>
+      <p:sp>
+        <p:nvSpPr>
+          <p:cNvPr id="10" name="TextBox 9"/>
           <p:cNvSpPr txBox="1"/>
           <p:nvPr/>
         </p:nvSpPr>
         <p:spPr>
           <a:xfrm>
-            <a:off x="1000000" y="3300000"/>
-            <a:ext cx="5000000" cy="400000"/>
+            <a:off x="1000000" y="6300000"/>
+            <a:ext cx="10000000" cy="400000"/>
           </a:xfrm>
           <a:prstGeom prst="rect">
             <a:avLst/>
@@ -4808,29 +4366,29 @@
           </a:bodyPr>
           <a:lstStyle/>
           <a:p>
-            <a:pPr algn="l"/>
-            <a:r>
-              <a:rPr sz="1400" b="0">
-                <a:solidFill>
-                  <a:srgbClr val="1A1714"/>
+            <a:pPr algn="ctr"/>
+            <a:r>
+              <a:rPr sz="1100" b="0">
+                <a:solidFill>
+                  <a:srgbClr val="8B6B22"/>
                 </a:solidFill>
                 <a:latin typeface="DM Sans"/>
               </a:rPr>
-              <a:t>github.com/ghwmelite-dotcom/OHCS-SmartGate-Staff-Attendance-System</a:t>
-            </a:r>
-          </a:p>
-        </p:txBody>
-      </p:sp>
-      <p:sp>
-        <p:nvSpPr>
-          <p:cNvPr id="7" name="TextBox 6"/>
+              <a:t>Built on Cloudflare's edge · Designed in the Kente Executive language</a:t>
+            </a:r>
+          </a:p>
+        </p:txBody>
+      </p:sp>
+      <p:sp>
+        <p:nvSpPr>
+          <p:cNvPr id="11" name="TextBox 10"/>
           <p:cNvSpPr txBox="1"/>
           <p:nvPr/>
         </p:nvSpPr>
         <p:spPr>
           <a:xfrm>
-            <a:off x="7000000" y="2000000"/>
-            <a:ext cx="5000000" cy="400000"/>
+            <a:off x="8000000" y="6500000"/>
+            <a:ext cx="4000000" cy="300000"/>
           </a:xfrm>
           <a:prstGeom prst="rect">
             <a:avLst/>
@@ -4843,155 +4401,15 @@
           </a:bodyPr>
           <a:lstStyle/>
           <a:p>
-            <a:pPr algn="l"/>
-            <a:r>
-              <a:rPr sz="1800" b="1">
-                <a:solidFill>
-                  <a:srgbClr val="8B6B22"/>
+            <a:pPr algn="r"/>
+            <a:r>
+              <a:rPr sz="1100" b="0">
+                <a:solidFill>
+                  <a:srgbClr val="D8CFBE"/>
                 </a:solidFill>
                 <a:latin typeface="DM Sans"/>
               </a:rPr>
-              <a:t>Related decks</a:t>
-            </a:r>
-          </a:p>
-        </p:txBody>
-      </p:sp>
-      <p:sp>
-        <p:nvSpPr>
-          <p:cNvPr id="8" name="TextBox 7"/>
-          <p:cNvSpPr txBox="1"/>
-          <p:nvPr/>
-        </p:nvSpPr>
-        <p:spPr>
-          <a:xfrm>
-            <a:off x="7000000" y="2500000"/>
-            <a:ext cx="5000000" cy="400000"/>
-          </a:xfrm>
-          <a:prstGeom prst="rect">
-            <a:avLst/>
-          </a:prstGeom>
-          <a:noFill/>
-        </p:spPr>
-        <p:txBody>
-          <a:bodyPr wrap="square">
-            <a:spAutoFit/>
-          </a:bodyPr>
-          <a:lstStyle/>
-          <a:p>
-            <a:pPr algn="l"/>
-            <a:r>
-              <a:rPr sz="1400" b="0">
-                <a:solidFill>
-                  <a:srgbClr val="1A1714"/>
-                </a:solidFill>
-                <a:latin typeface="DM Sans"/>
-              </a:rPr>
-              <a:t>Deck 06 · The Notifications Engine</a:t>
-            </a:r>
-          </a:p>
-        </p:txBody>
-      </p:sp>
-      <p:sp>
-        <p:nvSpPr>
-          <p:cNvPr id="9" name="TextBox 8"/>
-          <p:cNvSpPr txBox="1"/>
-          <p:nvPr/>
-        </p:nvSpPr>
-        <p:spPr>
-          <a:xfrm>
-            <a:off x="7000000" y="2900000"/>
-            <a:ext cx="5000000" cy="400000"/>
-          </a:xfrm>
-          <a:prstGeom prst="rect">
-            <a:avLst/>
-          </a:prstGeom>
-          <a:noFill/>
-        </p:spPr>
-        <p:txBody>
-          <a:bodyPr wrap="square">
-            <a:spAutoFit/>
-          </a:bodyPr>
-          <a:lstStyle/>
-          <a:p>
-            <a:pPr algn="l"/>
-            <a:r>
-              <a:rPr sz="1400" b="0">
-                <a:solidFill>
-                  <a:srgbClr val="1A1714"/>
-                </a:solidFill>
-                <a:latin typeface="DM Sans"/>
-              </a:rPr>
-              <a:t>Deck 12 · The Build Discipline</a:t>
-            </a:r>
-          </a:p>
-        </p:txBody>
-      </p:sp>
-      <p:sp>
-        <p:nvSpPr>
-          <p:cNvPr id="10" name="TextBox 9"/>
-          <p:cNvSpPr txBox="1"/>
-          <p:nvPr/>
-        </p:nvSpPr>
-        <p:spPr>
-          <a:xfrm>
-            <a:off x="1000000" y="6300000"/>
-            <a:ext cx="10000000" cy="400000"/>
-          </a:xfrm>
-          <a:prstGeom prst="rect">
-            <a:avLst/>
-          </a:prstGeom>
-          <a:noFill/>
-        </p:spPr>
-        <p:txBody>
-          <a:bodyPr wrap="square">
-            <a:spAutoFit/>
-          </a:bodyPr>
-          <a:lstStyle/>
-          <a:p>
-            <a:pPr algn="ctr"/>
-            <a:r>
-              <a:rPr sz="1100" b="0">
-                <a:solidFill>
-                  <a:srgbClr val="8B6B22"/>
-                </a:solidFill>
-                <a:latin typeface="DM Sans"/>
-              </a:rPr>
-              <a:t>Built on Cloudflare's edge · Designed in the Kente Executive language</a:t>
-            </a:r>
-          </a:p>
-        </p:txBody>
-      </p:sp>
-      <p:sp>
-        <p:nvSpPr>
-          <p:cNvPr id="11" name="TextBox 10"/>
-          <p:cNvSpPr txBox="1"/>
-          <p:nvPr/>
-        </p:nvSpPr>
-        <p:spPr>
-          <a:xfrm>
-            <a:off x="8000000" y="6500000"/>
-            <a:ext cx="4000000" cy="300000"/>
-          </a:xfrm>
-          <a:prstGeom prst="rect">
-            <a:avLst/>
-          </a:prstGeom>
-          <a:noFill/>
-        </p:spPr>
-        <p:txBody>
-          <a:bodyPr wrap="square">
-            <a:spAutoFit/>
-          </a:bodyPr>
-          <a:lstStyle/>
-          <a:p>
-            <a:pPr algn="r"/>
-            <a:r>
-              <a:rPr sz="1100" b="0">
-                <a:solidFill>
-                  <a:srgbClr val="D8CFBE"/>
-                </a:solidFill>
-                <a:latin typeface="DM Sans"/>
-              </a:rPr>
-              <a:t>04 · Security &amp; Trust · 17/17</a:t>
+              <a:t>04 · Security &amp; Trust · 15/15</a:t>
             </a:r>
           </a:p>
         </p:txBody>
@@ -5172,7 +4590,7 @@
                 </a:solidFill>
                 <a:latin typeface="DM Sans"/>
               </a:rPr>
-              <a:t>04 · Security &amp; Trust · 03/17</a:t>
+              <a:t>04 · Security &amp; Trust · 03/15</a:t>
             </a:r>
           </a:p>
         </p:txBody>
@@ -5327,7 +4745,7 @@
                 </a:solidFill>
                 <a:latin typeface="DM Sans"/>
               </a:rPr>
-              <a:t>04 · Security &amp; Trust · 04/17</a:t>
+              <a:t>04 · Security &amp; Trust · 04/15</a:t>
             </a:r>
           </a:p>
         </p:txBody>
@@ -5617,7 +5035,7 @@
                 </a:solidFill>
                 <a:latin typeface="DM Sans"/>
               </a:rPr>
-              <a:t>04 · Security &amp; Trust · 05/17</a:t>
+              <a:t>04 · Security &amp; Trust · 05/15</a:t>
             </a:r>
           </a:p>
         </p:txBody>
@@ -5772,7 +5190,7 @@
                 </a:solidFill>
                 <a:latin typeface="DM Sans"/>
               </a:rPr>
-              <a:t>04 · Security &amp; Trust · 06/17</a:t>
+              <a:t>04 · Security &amp; Trust · 06/15</a:t>
             </a:r>
           </a:p>
         </p:txBody>
@@ -6062,7 +5480,7 @@
                 </a:solidFill>
                 <a:latin typeface="DM Sans"/>
               </a:rPr>
-              <a:t>04 · Security &amp; Trust · 07/17</a:t>
+              <a:t>04 · Security &amp; Trust · 07/15</a:t>
             </a:r>
           </a:p>
         </p:txBody>
@@ -6217,7 +5635,7 @@
                 </a:solidFill>
                 <a:latin typeface="DM Sans"/>
               </a:rPr>
-              <a:t>04 · Security &amp; Trust · 08/17</a:t>
+              <a:t>04 · Security &amp; Trust · 08/15</a:t>
             </a:r>
           </a:p>
         </p:txBody>
@@ -6507,7 +5925,7 @@
                 </a:solidFill>
                 <a:latin typeface="DM Sans"/>
               </a:rPr>
-              <a:t>04 · Security &amp; Trust · 09/17</a:t>
+              <a:t>04 · Security &amp; Trust · 09/15</a:t>
             </a:r>
           </a:p>
         </p:txBody>
